--- a/tassonomia.pptx
+++ b/tassonomia.pptx
@@ -259,7 +259,7 @@
           <a:p>
             <a:fld id="{937C7D22-69C9-4B7C-A8DA-4DEC6D3458F3}" type="datetimeFigureOut">
               <a:rPr lang="it-IT" smtClean="0"/>
-              <a:t>24/03/2026</a:t>
+              <a:t>01/04/2026</a:t>
             </a:fld>
             <a:endParaRPr lang="it-IT"/>
           </a:p>
@@ -457,7 +457,7 @@
           <a:p>
             <a:fld id="{937C7D22-69C9-4B7C-A8DA-4DEC6D3458F3}" type="datetimeFigureOut">
               <a:rPr lang="it-IT" smtClean="0"/>
-              <a:t>24/03/2026</a:t>
+              <a:t>01/04/2026</a:t>
             </a:fld>
             <a:endParaRPr lang="it-IT"/>
           </a:p>
@@ -665,7 +665,7 @@
           <a:p>
             <a:fld id="{937C7D22-69C9-4B7C-A8DA-4DEC6D3458F3}" type="datetimeFigureOut">
               <a:rPr lang="it-IT" smtClean="0"/>
-              <a:t>24/03/2026</a:t>
+              <a:t>01/04/2026</a:t>
             </a:fld>
             <a:endParaRPr lang="it-IT"/>
           </a:p>
@@ -863,7 +863,7 @@
           <a:p>
             <a:fld id="{937C7D22-69C9-4B7C-A8DA-4DEC6D3458F3}" type="datetimeFigureOut">
               <a:rPr lang="it-IT" smtClean="0"/>
-              <a:t>24/03/2026</a:t>
+              <a:t>01/04/2026</a:t>
             </a:fld>
             <a:endParaRPr lang="it-IT"/>
           </a:p>
@@ -1138,7 +1138,7 @@
           <a:p>
             <a:fld id="{937C7D22-69C9-4B7C-A8DA-4DEC6D3458F3}" type="datetimeFigureOut">
               <a:rPr lang="it-IT" smtClean="0"/>
-              <a:t>24/03/2026</a:t>
+              <a:t>01/04/2026</a:t>
             </a:fld>
             <a:endParaRPr lang="it-IT"/>
           </a:p>
@@ -1403,7 +1403,7 @@
           <a:p>
             <a:fld id="{937C7D22-69C9-4B7C-A8DA-4DEC6D3458F3}" type="datetimeFigureOut">
               <a:rPr lang="it-IT" smtClean="0"/>
-              <a:t>24/03/2026</a:t>
+              <a:t>01/04/2026</a:t>
             </a:fld>
             <a:endParaRPr lang="it-IT"/>
           </a:p>
@@ -1815,7 +1815,7 @@
           <a:p>
             <a:fld id="{937C7D22-69C9-4B7C-A8DA-4DEC6D3458F3}" type="datetimeFigureOut">
               <a:rPr lang="it-IT" smtClean="0"/>
-              <a:t>24/03/2026</a:t>
+              <a:t>01/04/2026</a:t>
             </a:fld>
             <a:endParaRPr lang="it-IT"/>
           </a:p>
@@ -1956,7 +1956,7 @@
           <a:p>
             <a:fld id="{937C7D22-69C9-4B7C-A8DA-4DEC6D3458F3}" type="datetimeFigureOut">
               <a:rPr lang="it-IT" smtClean="0"/>
-              <a:t>24/03/2026</a:t>
+              <a:t>01/04/2026</a:t>
             </a:fld>
             <a:endParaRPr lang="it-IT"/>
           </a:p>
@@ -2069,7 +2069,7 @@
           <a:p>
             <a:fld id="{937C7D22-69C9-4B7C-A8DA-4DEC6D3458F3}" type="datetimeFigureOut">
               <a:rPr lang="it-IT" smtClean="0"/>
-              <a:t>24/03/2026</a:t>
+              <a:t>01/04/2026</a:t>
             </a:fld>
             <a:endParaRPr lang="it-IT"/>
           </a:p>
@@ -2380,7 +2380,7 @@
           <a:p>
             <a:fld id="{937C7D22-69C9-4B7C-A8DA-4DEC6D3458F3}" type="datetimeFigureOut">
               <a:rPr lang="it-IT" smtClean="0"/>
-              <a:t>24/03/2026</a:t>
+              <a:t>01/04/2026</a:t>
             </a:fld>
             <a:endParaRPr lang="it-IT"/>
           </a:p>
@@ -2668,7 +2668,7 @@
           <a:p>
             <a:fld id="{937C7D22-69C9-4B7C-A8DA-4DEC6D3458F3}" type="datetimeFigureOut">
               <a:rPr lang="it-IT" smtClean="0"/>
-              <a:t>24/03/2026</a:t>
+              <a:t>01/04/2026</a:t>
             </a:fld>
             <a:endParaRPr lang="it-IT"/>
           </a:p>
@@ -2909,7 +2909,7 @@
           <a:p>
             <a:fld id="{937C7D22-69C9-4B7C-A8DA-4DEC6D3458F3}" type="datetimeFigureOut">
               <a:rPr lang="it-IT" smtClean="0"/>
-              <a:t>24/03/2026</a:t>
+              <a:t>01/04/2026</a:t>
             </a:fld>
             <a:endParaRPr lang="it-IT"/>
           </a:p>
@@ -3337,14 +3337,15 @@
           </p:cNvPr>
           <p:cNvCxnSpPr>
             <a:cxnSpLocks/>
-            <a:endCxn id="9" idx="7"/>
+            <a:stCxn id="4" idx="2"/>
+            <a:endCxn id="9" idx="6"/>
           </p:cNvCxnSpPr>
           <p:nvPr/>
         </p:nvCxnSpPr>
         <p:spPr>
           <a:xfrm flipH="1">
-            <a:off x="4192031" y="795130"/>
-            <a:ext cx="923309" cy="302473"/>
+            <a:off x="3753471" y="738043"/>
+            <a:ext cx="1164230" cy="229087"/>
           </a:xfrm>
           <a:prstGeom prst="straightConnector1">
             <a:avLst/>
@@ -3379,14 +3380,15 @@
           </p:cNvPr>
           <p:cNvCxnSpPr>
             <a:cxnSpLocks/>
-            <a:endCxn id="10" idx="1"/>
+            <a:stCxn id="4" idx="6"/>
+            <a:endCxn id="10" idx="2"/>
           </p:cNvCxnSpPr>
           <p:nvPr/>
         </p:nvCxnSpPr>
         <p:spPr>
           <a:xfrm>
-            <a:off x="7076661" y="940403"/>
-            <a:ext cx="571646" cy="536714"/>
+            <a:off x="7318994" y="738043"/>
+            <a:ext cx="1164231" cy="235800"/>
           </a:xfrm>
           <a:prstGeom prst="straightConnector1">
             <a:avLst/>
@@ -3410,64 +3412,21 @@
           </a:fontRef>
         </p:style>
       </p:cxnSp>
-      <p:cxnSp>
-        <p:nvCxnSpPr>
-          <p:cNvPr id="31" name="Connettore 2 30">
-            <a:extLst>
-              <a:ext uri="{FF2B5EF4-FFF2-40B4-BE49-F238E27FC236}">
-                <a16:creationId xmlns:a16="http://schemas.microsoft.com/office/drawing/2014/main" id="{338A8AFD-9CD7-1605-D59F-5A72472B5977}"/>
-              </a:ext>
-            </a:extLst>
-          </p:cNvPr>
-          <p:cNvCxnSpPr>
-            <a:cxnSpLocks/>
-            <a:stCxn id="10" idx="4"/>
-            <a:endCxn id="25" idx="1"/>
-          </p:cNvCxnSpPr>
+      <p:sp>
+        <p:nvSpPr>
+          <p:cNvPr id="4" name="Ovale 3">
+            <a:extLst>
+              <a:ext uri="{FF2B5EF4-FFF2-40B4-BE49-F238E27FC236}">
+                <a16:creationId xmlns:a16="http://schemas.microsoft.com/office/drawing/2014/main" id="{5105CC2A-5B89-C9BC-54E6-EB62923B8A39}"/>
+              </a:ext>
+            </a:extLst>
+          </p:cNvPr>
+          <p:cNvSpPr/>
           <p:nvPr/>
-        </p:nvCxnSpPr>
+        </p:nvSpPr>
         <p:spPr>
           <a:xfrm>
-            <a:off x="8497293" y="2393344"/>
-            <a:ext cx="633917" cy="1545027"/>
-          </a:xfrm>
-          <a:prstGeom prst="straightConnector1">
-            <a:avLst/>
-          </a:prstGeom>
-          <a:ln>
-            <a:tailEnd type="triangle"/>
-          </a:ln>
-        </p:spPr>
-        <p:style>
-          <a:lnRef idx="2">
-            <a:schemeClr val="accent1"/>
-          </a:lnRef>
-          <a:fillRef idx="0">
-            <a:schemeClr val="accent1"/>
-          </a:fillRef>
-          <a:effectRef idx="1">
-            <a:schemeClr val="accent1"/>
-          </a:effectRef>
-          <a:fontRef idx="minor">
-            <a:schemeClr val="tx1"/>
-          </a:fontRef>
-        </p:style>
-      </p:cxnSp>
-      <p:sp>
-        <p:nvSpPr>
-          <p:cNvPr id="4" name="Ovale 3">
-            <a:extLst>
-              <a:ext uri="{FF2B5EF4-FFF2-40B4-BE49-F238E27FC236}">
-                <a16:creationId xmlns:a16="http://schemas.microsoft.com/office/drawing/2014/main" id="{5105CC2A-5B89-C9BC-54E6-EB62923B8A39}"/>
-              </a:ext>
-            </a:extLst>
-          </p:cNvPr>
-          <p:cNvSpPr/>
-          <p:nvPr/>
-        </p:nvSpPr>
-        <p:spPr>
-          <a:xfrm>
-            <a:off x="4895353" y="246490"/>
+            <a:off x="4917701" y="201329"/>
             <a:ext cx="2401293" cy="1073427"/>
           </a:xfrm>
           <a:prstGeom prst="ellipse">
@@ -3476,13 +3435,13 @@
         </p:spPr>
         <p:style>
           <a:lnRef idx="1">
-            <a:schemeClr val="accent1"/>
+            <a:schemeClr val="accent4"/>
           </a:lnRef>
           <a:fillRef idx="2">
-            <a:schemeClr val="accent1"/>
+            <a:schemeClr val="accent4"/>
           </a:fillRef>
           <a:effectRef idx="1">
-            <a:schemeClr val="accent1"/>
+            <a:schemeClr val="accent4"/>
           </a:effectRef>
           <a:fontRef idx="minor">
             <a:schemeClr val="dk1"/>
@@ -3531,7 +3490,7 @@
         </p:nvSpPr>
         <p:spPr>
           <a:xfrm>
-            <a:off x="2142399" y="940403"/>
+            <a:off x="1352178" y="430416"/>
             <a:ext cx="2401293" cy="1073427"/>
           </a:xfrm>
           <a:prstGeom prst="ellipse">
@@ -3540,13 +3499,13 @@
         </p:spPr>
         <p:style>
           <a:lnRef idx="1">
-            <a:schemeClr val="accent1"/>
+            <a:schemeClr val="accent4"/>
           </a:lnRef>
           <a:fillRef idx="2">
-            <a:schemeClr val="accent1"/>
+            <a:schemeClr val="accent4"/>
           </a:fillRef>
           <a:effectRef idx="1">
-            <a:schemeClr val="accent1"/>
+            <a:schemeClr val="accent4"/>
           </a:effectRef>
           <a:fontRef idx="minor">
             <a:schemeClr val="dk1"/>
@@ -3578,7 +3537,7 @@
         </p:nvSpPr>
         <p:spPr>
           <a:xfrm>
-            <a:off x="7296646" y="1319917"/>
+            <a:off x="8483225" y="437129"/>
             <a:ext cx="2401293" cy="1073427"/>
           </a:xfrm>
           <a:prstGeom prst="ellipse">
@@ -3587,13 +3546,13 @@
         </p:spPr>
         <p:style>
           <a:lnRef idx="1">
-            <a:schemeClr val="accent1"/>
+            <a:schemeClr val="accent4"/>
           </a:lnRef>
           <a:fillRef idx="2">
-            <a:schemeClr val="accent1"/>
+            <a:schemeClr val="accent4"/>
           </a:fillRef>
           <a:effectRef idx="1">
-            <a:schemeClr val="accent1"/>
+            <a:schemeClr val="accent4"/>
           </a:effectRef>
           <a:fontRef idx="minor">
             <a:schemeClr val="dk1"/>
@@ -3625,7 +3584,7 @@
         </p:nvSpPr>
         <p:spPr>
           <a:xfrm>
-            <a:off x="165599" y="2138312"/>
+            <a:off x="129183" y="2053130"/>
             <a:ext cx="2401293" cy="1073427"/>
           </a:xfrm>
           <a:prstGeom prst="ellipse">
@@ -3634,13 +3593,13 @@
         </p:spPr>
         <p:style>
           <a:lnRef idx="1">
-            <a:schemeClr val="accent1"/>
+            <a:schemeClr val="accent4"/>
           </a:lnRef>
           <a:fillRef idx="2">
-            <a:schemeClr val="accent1"/>
+            <a:schemeClr val="accent4"/>
           </a:fillRef>
           <a:effectRef idx="1">
-            <a:schemeClr val="accent1"/>
+            <a:schemeClr val="accent4"/>
           </a:effectRef>
           <a:fontRef idx="minor">
             <a:schemeClr val="dk1"/>
@@ -3673,7 +3632,7 @@
         </p:nvSpPr>
         <p:spPr>
           <a:xfrm>
-            <a:off x="3453038" y="2236144"/>
+            <a:off x="3346710" y="2053130"/>
             <a:ext cx="2401293" cy="1073427"/>
           </a:xfrm>
           <a:prstGeom prst="ellipse">
@@ -3682,13 +3641,13 @@
         </p:spPr>
         <p:style>
           <a:lnRef idx="1">
-            <a:schemeClr val="accent1"/>
+            <a:schemeClr val="accent4"/>
           </a:lnRef>
           <a:fillRef idx="2">
-            <a:schemeClr val="accent1"/>
+            <a:schemeClr val="accent4"/>
           </a:fillRef>
           <a:effectRef idx="1">
-            <a:schemeClr val="accent1"/>
+            <a:schemeClr val="accent4"/>
           </a:effectRef>
           <a:fontRef idx="minor">
             <a:schemeClr val="dk1"/>
@@ -3715,107 +3674,21 @@
           </a:p>
         </p:txBody>
       </p:sp>
-      <p:cxnSp>
-        <p:nvCxnSpPr>
-          <p:cNvPr id="15" name="Connettore 2 14">
-            <a:extLst>
-              <a:ext uri="{FF2B5EF4-FFF2-40B4-BE49-F238E27FC236}">
-                <a16:creationId xmlns:a16="http://schemas.microsoft.com/office/drawing/2014/main" id="{3A70527B-4E5D-9DAA-ACC9-1634FE992DFF}"/>
-              </a:ext>
-            </a:extLst>
-          </p:cNvPr>
-          <p:cNvCxnSpPr>
-            <a:cxnSpLocks/>
-            <a:stCxn id="9" idx="3"/>
-            <a:endCxn id="11" idx="7"/>
-          </p:cNvCxnSpPr>
+      <p:sp>
+        <p:nvSpPr>
+          <p:cNvPr id="24" name="Ovale 23">
+            <a:extLst>
+              <a:ext uri="{FF2B5EF4-FFF2-40B4-BE49-F238E27FC236}">
+                <a16:creationId xmlns:a16="http://schemas.microsoft.com/office/drawing/2014/main" id="{0A7EF678-4CEB-6ECE-1CB3-1EEABB12E81B}"/>
+              </a:ext>
+            </a:extLst>
+          </p:cNvPr>
+          <p:cNvSpPr/>
           <p:nvPr/>
-        </p:nvCxnSpPr>
-        <p:spPr>
-          <a:xfrm flipH="1">
-            <a:off x="2215231" y="1856630"/>
-            <a:ext cx="278829" cy="438882"/>
-          </a:xfrm>
-          <a:prstGeom prst="straightConnector1">
-            <a:avLst/>
-          </a:prstGeom>
-          <a:ln>
-            <a:tailEnd type="triangle"/>
-          </a:ln>
-        </p:spPr>
-        <p:style>
-          <a:lnRef idx="2">
-            <a:schemeClr val="accent1"/>
-          </a:lnRef>
-          <a:fillRef idx="0">
-            <a:schemeClr val="accent1"/>
-          </a:fillRef>
-          <a:effectRef idx="1">
-            <a:schemeClr val="accent1"/>
-          </a:effectRef>
-          <a:fontRef idx="minor">
-            <a:schemeClr val="tx1"/>
-          </a:fontRef>
-        </p:style>
-      </p:cxnSp>
-      <p:cxnSp>
-        <p:nvCxnSpPr>
-          <p:cNvPr id="18" name="Connettore 2 17">
-            <a:extLst>
-              <a:ext uri="{FF2B5EF4-FFF2-40B4-BE49-F238E27FC236}">
-                <a16:creationId xmlns:a16="http://schemas.microsoft.com/office/drawing/2014/main" id="{439EF74C-98D0-3443-5E2D-C6E9A2A3B3A5}"/>
-              </a:ext>
-            </a:extLst>
-          </p:cNvPr>
-          <p:cNvCxnSpPr>
-            <a:cxnSpLocks/>
-            <a:stCxn id="9" idx="5"/>
-            <a:endCxn id="12" idx="0"/>
-          </p:cNvCxnSpPr>
-          <p:nvPr/>
-        </p:nvCxnSpPr>
+        </p:nvSpPr>
         <p:spPr>
           <a:xfrm>
-            <a:off x="4192031" y="1856630"/>
-            <a:ext cx="461654" cy="379514"/>
-          </a:xfrm>
-          <a:prstGeom prst="straightConnector1">
-            <a:avLst/>
-          </a:prstGeom>
-          <a:ln>
-            <a:tailEnd type="triangle"/>
-          </a:ln>
-        </p:spPr>
-        <p:style>
-          <a:lnRef idx="2">
-            <a:schemeClr val="accent1"/>
-          </a:lnRef>
-          <a:fillRef idx="0">
-            <a:schemeClr val="accent1"/>
-          </a:fillRef>
-          <a:effectRef idx="1">
-            <a:schemeClr val="accent1"/>
-          </a:effectRef>
-          <a:fontRef idx="minor">
-            <a:schemeClr val="tx1"/>
-          </a:fontRef>
-        </p:style>
-      </p:cxnSp>
-      <p:sp>
-        <p:nvSpPr>
-          <p:cNvPr id="24" name="Ovale 23">
-            <a:extLst>
-              <a:ext uri="{FF2B5EF4-FFF2-40B4-BE49-F238E27FC236}">
-                <a16:creationId xmlns:a16="http://schemas.microsoft.com/office/drawing/2014/main" id="{0A7EF678-4CEB-6ECE-1CB3-1EEABB12E81B}"/>
-              </a:ext>
-            </a:extLst>
-          </p:cNvPr>
-          <p:cNvSpPr/>
-          <p:nvPr/>
-        </p:nvSpPr>
-        <p:spPr>
-          <a:xfrm>
-            <a:off x="5789034" y="2923284"/>
+            <a:off x="6378256" y="2047270"/>
             <a:ext cx="2401293" cy="1073427"/>
           </a:xfrm>
           <a:prstGeom prst="ellipse">
@@ -3824,13 +3697,13 @@
         </p:spPr>
         <p:style>
           <a:lnRef idx="1">
-            <a:schemeClr val="accent1"/>
+            <a:schemeClr val="accent4"/>
           </a:lnRef>
           <a:fillRef idx="2">
-            <a:schemeClr val="accent1"/>
+            <a:schemeClr val="accent4"/>
           </a:fillRef>
           <a:effectRef idx="1">
-            <a:schemeClr val="accent1"/>
+            <a:schemeClr val="accent4"/>
           </a:effectRef>
           <a:fontRef idx="minor">
             <a:schemeClr val="dk1"/>
@@ -3863,7 +3736,7 @@
         </p:nvSpPr>
         <p:spPr>
           <a:xfrm>
-            <a:off x="8779549" y="3781171"/>
+            <a:off x="8004578" y="3893210"/>
             <a:ext cx="2401293" cy="1073427"/>
           </a:xfrm>
           <a:prstGeom prst="ellipse">
@@ -3872,13 +3745,13 @@
         </p:spPr>
         <p:style>
           <a:lnRef idx="1">
-            <a:schemeClr val="accent1"/>
+            <a:schemeClr val="accent4"/>
           </a:lnRef>
           <a:fillRef idx="2">
-            <a:schemeClr val="accent1"/>
+            <a:schemeClr val="accent4"/>
           </a:fillRef>
           <a:effectRef idx="1">
-            <a:schemeClr val="accent1"/>
+            <a:schemeClr val="accent4"/>
           </a:effectRef>
           <a:fontRef idx="minor">
             <a:schemeClr val="dk1"/>
@@ -3901,107 +3774,21 @@
           </a:p>
         </p:txBody>
       </p:sp>
-      <p:cxnSp>
-        <p:nvCxnSpPr>
-          <p:cNvPr id="28" name="Connettore 2 27">
-            <a:extLst>
-              <a:ext uri="{FF2B5EF4-FFF2-40B4-BE49-F238E27FC236}">
-                <a16:creationId xmlns:a16="http://schemas.microsoft.com/office/drawing/2014/main" id="{17EFAD92-4339-7D06-EC40-B6D975AB10A9}"/>
-              </a:ext>
-            </a:extLst>
-          </p:cNvPr>
-          <p:cNvCxnSpPr>
-            <a:cxnSpLocks/>
-            <a:stCxn id="10" idx="3"/>
-            <a:endCxn id="24" idx="0"/>
-          </p:cNvCxnSpPr>
+      <p:sp>
+        <p:nvSpPr>
+          <p:cNvPr id="60" name="Ovale 59">
+            <a:extLst>
+              <a:ext uri="{FF2B5EF4-FFF2-40B4-BE49-F238E27FC236}">
+                <a16:creationId xmlns:a16="http://schemas.microsoft.com/office/drawing/2014/main" id="{02D4DF5B-90C4-772F-9288-B1F46475E4FD}"/>
+              </a:ext>
+            </a:extLst>
+          </p:cNvPr>
+          <p:cNvSpPr/>
           <p:nvPr/>
-        </p:nvCxnSpPr>
-        <p:spPr>
-          <a:xfrm flipH="1">
-            <a:off x="6989681" y="2236144"/>
-            <a:ext cx="658626" cy="687140"/>
-          </a:xfrm>
-          <a:prstGeom prst="straightConnector1">
-            <a:avLst/>
-          </a:prstGeom>
-          <a:ln>
-            <a:tailEnd type="triangle"/>
-          </a:ln>
-        </p:spPr>
-        <p:style>
-          <a:lnRef idx="2">
-            <a:schemeClr val="accent1"/>
-          </a:lnRef>
-          <a:fillRef idx="0">
-            <a:schemeClr val="accent1"/>
-          </a:fillRef>
-          <a:effectRef idx="1">
-            <a:schemeClr val="accent1"/>
-          </a:effectRef>
-          <a:fontRef idx="minor">
-            <a:schemeClr val="tx1"/>
-          </a:fontRef>
-        </p:style>
-      </p:cxnSp>
-      <p:cxnSp>
-        <p:nvCxnSpPr>
-          <p:cNvPr id="35" name="Connettore 2 34">
-            <a:extLst>
-              <a:ext uri="{FF2B5EF4-FFF2-40B4-BE49-F238E27FC236}">
-                <a16:creationId xmlns:a16="http://schemas.microsoft.com/office/drawing/2014/main" id="{86F3832F-226A-AC2E-2856-96EBA6FFE640}"/>
-              </a:ext>
-            </a:extLst>
-          </p:cNvPr>
-          <p:cNvCxnSpPr>
-            <a:cxnSpLocks/>
-            <a:stCxn id="10" idx="5"/>
-            <a:endCxn id="60" idx="1"/>
-          </p:cNvCxnSpPr>
-          <p:nvPr/>
-        </p:nvCxnSpPr>
+        </p:nvSpPr>
         <p:spPr>
           <a:xfrm>
-            <a:off x="9346278" y="2236144"/>
-            <a:ext cx="558345" cy="471600"/>
-          </a:xfrm>
-          <a:prstGeom prst="straightConnector1">
-            <a:avLst/>
-          </a:prstGeom>
-          <a:ln>
-            <a:tailEnd type="triangle"/>
-          </a:ln>
-        </p:spPr>
-        <p:style>
-          <a:lnRef idx="2">
-            <a:schemeClr val="accent1"/>
-          </a:lnRef>
-          <a:fillRef idx="0">
-            <a:schemeClr val="accent1"/>
-          </a:fillRef>
-          <a:effectRef idx="1">
-            <a:schemeClr val="accent1"/>
-          </a:effectRef>
-          <a:fontRef idx="minor">
-            <a:schemeClr val="tx1"/>
-          </a:fontRef>
-        </p:style>
-      </p:cxnSp>
-      <p:sp>
-        <p:nvSpPr>
-          <p:cNvPr id="60" name="Ovale 59">
-            <a:extLst>
-              <a:ext uri="{FF2B5EF4-FFF2-40B4-BE49-F238E27FC236}">
-                <a16:creationId xmlns:a16="http://schemas.microsoft.com/office/drawing/2014/main" id="{02D4DF5B-90C4-772F-9288-B1F46475E4FD}"/>
-              </a:ext>
-            </a:extLst>
-          </p:cNvPr>
-          <p:cNvSpPr/>
-          <p:nvPr/>
-        </p:nvSpPr>
-        <p:spPr>
-          <a:xfrm>
-            <a:off x="9542552" y="2550544"/>
+            <a:off x="9590439" y="2047269"/>
             <a:ext cx="2472378" cy="1073427"/>
           </a:xfrm>
           <a:prstGeom prst="ellipse">
@@ -4010,13 +3797,13 @@
         </p:spPr>
         <p:style>
           <a:lnRef idx="1">
-            <a:schemeClr val="accent1"/>
+            <a:schemeClr val="accent4"/>
           </a:lnRef>
           <a:fillRef idx="2">
-            <a:schemeClr val="accent1"/>
+            <a:schemeClr val="accent4"/>
           </a:fillRef>
           <a:effectRef idx="1">
-            <a:schemeClr val="accent1"/>
+            <a:schemeClr val="accent4"/>
           </a:effectRef>
           <a:fontRef idx="minor">
             <a:schemeClr val="dk1"/>
@@ -4083,24 +3870,24 @@
       </p:sp>
       <p:cxnSp>
         <p:nvCxnSpPr>
-          <p:cNvPr id="72" name="Connettore 2 71">
-            <a:extLst>
-              <a:ext uri="{FF2B5EF4-FFF2-40B4-BE49-F238E27FC236}">
-                <a16:creationId xmlns:a16="http://schemas.microsoft.com/office/drawing/2014/main" id="{A4625BDC-13CD-A05D-CFE7-E627D5A14C9B}"/>
+          <p:cNvPr id="76" name="Connettore 2 75">
+            <a:extLst>
+              <a:ext uri="{FF2B5EF4-FFF2-40B4-BE49-F238E27FC236}">
+                <a16:creationId xmlns:a16="http://schemas.microsoft.com/office/drawing/2014/main" id="{12A14FDA-AD1B-0C12-A76F-4A71FC43131F}"/>
               </a:ext>
             </a:extLst>
           </p:cNvPr>
           <p:cNvCxnSpPr>
             <a:cxnSpLocks/>
-            <a:stCxn id="24" idx="4"/>
-            <a:endCxn id="71" idx="0"/>
+            <a:stCxn id="25" idx="3"/>
+            <a:endCxn id="71" idx="6"/>
           </p:cNvCxnSpPr>
           <p:nvPr/>
         </p:nvCxnSpPr>
         <p:spPr>
           <a:xfrm flipH="1">
-            <a:off x="6118348" y="3996711"/>
-            <a:ext cx="871333" cy="778374"/>
+            <a:off x="7318994" y="4809437"/>
+            <a:ext cx="1037245" cy="502362"/>
           </a:xfrm>
           <a:prstGeom prst="straightConnector1">
             <a:avLst/>
@@ -4127,52 +3914,6 @@
           </a:fontRef>
         </p:style>
       </p:cxnSp>
-      <p:cxnSp>
-        <p:nvCxnSpPr>
-          <p:cNvPr id="76" name="Connettore 2 75">
-            <a:extLst>
-              <a:ext uri="{FF2B5EF4-FFF2-40B4-BE49-F238E27FC236}">
-                <a16:creationId xmlns:a16="http://schemas.microsoft.com/office/drawing/2014/main" id="{12A14FDA-AD1B-0C12-A76F-4A71FC43131F}"/>
-              </a:ext>
-            </a:extLst>
-          </p:cNvPr>
-          <p:cNvCxnSpPr>
-            <a:cxnSpLocks/>
-            <a:stCxn id="25" idx="3"/>
-            <a:endCxn id="71" idx="7"/>
-          </p:cNvCxnSpPr>
-          <p:nvPr/>
-        </p:nvCxnSpPr>
-        <p:spPr>
-          <a:xfrm flipH="1">
-            <a:off x="6967333" y="4697398"/>
-            <a:ext cx="2163877" cy="234887"/>
-          </a:xfrm>
-          <a:prstGeom prst="straightConnector1">
-            <a:avLst/>
-          </a:prstGeom>
-          <a:ln>
-            <a:solidFill>
-              <a:schemeClr val="accent2"/>
-            </a:solidFill>
-            <a:tailEnd type="triangle"/>
-          </a:ln>
-        </p:spPr>
-        <p:style>
-          <a:lnRef idx="2">
-            <a:schemeClr val="accent1"/>
-          </a:lnRef>
-          <a:fillRef idx="0">
-            <a:schemeClr val="accent1"/>
-          </a:fillRef>
-          <a:effectRef idx="1">
-            <a:schemeClr val="accent1"/>
-          </a:effectRef>
-          <a:fontRef idx="minor">
-            <a:schemeClr val="tx1"/>
-          </a:fontRef>
-        </p:style>
-      </p:cxnSp>
       <p:sp>
         <p:nvSpPr>
           <p:cNvPr id="2" name="Ovale 1">
@@ -4187,7 +3928,7 @@
         </p:nvSpPr>
         <p:spPr>
           <a:xfrm>
-            <a:off x="1655974" y="3459997"/>
+            <a:off x="1715046" y="3812330"/>
             <a:ext cx="2472378" cy="1073427"/>
           </a:xfrm>
           <a:prstGeom prst="ellipse">
@@ -4196,13 +3937,13 @@
         </p:spPr>
         <p:style>
           <a:lnRef idx="1">
-            <a:schemeClr val="accent1"/>
+            <a:schemeClr val="accent4"/>
           </a:lnRef>
           <a:fillRef idx="2">
-            <a:schemeClr val="accent1"/>
+            <a:schemeClr val="accent4"/>
           </a:fillRef>
           <a:effectRef idx="1">
-            <a:schemeClr val="accent1"/>
+            <a:schemeClr val="accent4"/>
           </a:effectRef>
           <a:fontRef idx="minor">
             <a:schemeClr val="dk1"/>
@@ -4231,24 +3972,73 @@
       </p:sp>
       <p:cxnSp>
         <p:nvCxnSpPr>
-          <p:cNvPr id="43" name="Connettore 2 42">
-            <a:extLst>
-              <a:ext uri="{FF2B5EF4-FFF2-40B4-BE49-F238E27FC236}">
-                <a16:creationId xmlns:a16="http://schemas.microsoft.com/office/drawing/2014/main" id="{0110C7C9-1AC3-37DD-7ABC-FF1BD76F8A3C}"/>
+          <p:cNvPr id="13" name="Connettore 2 12">
+            <a:extLst>
+              <a:ext uri="{FF2B5EF4-FFF2-40B4-BE49-F238E27FC236}">
+                <a16:creationId xmlns:a16="http://schemas.microsoft.com/office/drawing/2014/main" id="{D118D2D9-4BD6-8DD3-92F4-DC1A929E725C}"/>
+              </a:ext>
+            </a:extLst>
+          </p:cNvPr>
+          <p:cNvCxnSpPr>
+            <a:cxnSpLocks/>
+            <a:stCxn id="2" idx="5"/>
+            <a:endCxn id="71" idx="2"/>
+          </p:cNvCxnSpPr>
+          <p:nvPr/>
+        </p:nvCxnSpPr>
+        <p:spPr>
+          <a:xfrm>
+            <a:off x="3825353" y="4728557"/>
+            <a:ext cx="1092348" cy="583242"/>
+          </a:xfrm>
+          <a:prstGeom prst="straightConnector1">
+            <a:avLst/>
+          </a:prstGeom>
+          <a:ln w="19050" cap="flat" cmpd="sng" algn="ctr">
+            <a:solidFill>
+              <a:schemeClr val="accent2"/>
+            </a:solidFill>
+            <a:prstDash val="dash"/>
+            <a:round/>
+            <a:headEnd type="none" w="med" len="med"/>
+            <a:tailEnd type="none" w="med" len="med"/>
+          </a:ln>
+        </p:spPr>
+        <p:style>
+          <a:lnRef idx="0">
+            <a:scrgbClr r="0" g="0" b="0"/>
+          </a:lnRef>
+          <a:fillRef idx="0">
+            <a:scrgbClr r="0" g="0" b="0"/>
+          </a:fillRef>
+          <a:effectRef idx="0">
+            <a:scrgbClr r="0" g="0" b="0"/>
+          </a:effectRef>
+          <a:fontRef idx="minor">
+            <a:schemeClr val="tx1"/>
+          </a:fontRef>
+        </p:style>
+      </p:cxnSp>
+      <p:cxnSp>
+        <p:nvCxnSpPr>
+          <p:cNvPr id="41" name="Connettore 2 40">
+            <a:extLst>
+              <a:ext uri="{FF2B5EF4-FFF2-40B4-BE49-F238E27FC236}">
+                <a16:creationId xmlns:a16="http://schemas.microsoft.com/office/drawing/2014/main" id="{E5B7B674-0232-201C-6525-CE790E5D752E}"/>
               </a:ext>
             </a:extLst>
           </p:cNvPr>
           <p:cNvCxnSpPr>
             <a:cxnSpLocks/>
             <a:stCxn id="9" idx="4"/>
-            <a:endCxn id="2" idx="0"/>
+            <a:endCxn id="11" idx="7"/>
           </p:cNvCxnSpPr>
           <p:nvPr/>
         </p:nvCxnSpPr>
         <p:spPr>
           <a:xfrm flipH="1">
-            <a:off x="2892163" y="2013830"/>
-            <a:ext cx="450883" cy="1446167"/>
+            <a:off x="2178815" y="1503843"/>
+            <a:ext cx="374010" cy="706487"/>
           </a:xfrm>
           <a:prstGeom prst="straightConnector1">
             <a:avLst/>
@@ -4274,47 +4064,259 @@
       </p:cxnSp>
       <p:cxnSp>
         <p:nvCxnSpPr>
-          <p:cNvPr id="13" name="Connettore 2 12">
-            <a:extLst>
-              <a:ext uri="{FF2B5EF4-FFF2-40B4-BE49-F238E27FC236}">
-                <a16:creationId xmlns:a16="http://schemas.microsoft.com/office/drawing/2014/main" id="{D118D2D9-4BD6-8DD3-92F4-DC1A929E725C}"/>
+          <p:cNvPr id="46" name="Connettore 2 45">
+            <a:extLst>
+              <a:ext uri="{FF2B5EF4-FFF2-40B4-BE49-F238E27FC236}">
+                <a16:creationId xmlns:a16="http://schemas.microsoft.com/office/drawing/2014/main" id="{508BE691-490A-35C2-222B-40F609549FAF}"/>
               </a:ext>
             </a:extLst>
           </p:cNvPr>
           <p:cNvCxnSpPr>
             <a:cxnSpLocks/>
-            <a:stCxn id="2" idx="5"/>
-            <a:endCxn id="71" idx="1"/>
+            <a:stCxn id="9" idx="4"/>
+            <a:endCxn id="12" idx="1"/>
           </p:cNvCxnSpPr>
           <p:nvPr/>
         </p:nvCxnSpPr>
         <p:spPr>
           <a:xfrm>
-            <a:off x="3766281" y="4376224"/>
-            <a:ext cx="1503081" cy="556061"/>
+            <a:off x="2552825" y="1503843"/>
+            <a:ext cx="1145546" cy="706487"/>
           </a:xfrm>
           <a:prstGeom prst="straightConnector1">
             <a:avLst/>
           </a:prstGeom>
-          <a:ln w="19050" cap="flat" cmpd="sng" algn="ctr">
+          <a:ln>
+            <a:tailEnd type="triangle"/>
+          </a:ln>
+        </p:spPr>
+        <p:style>
+          <a:lnRef idx="2">
+            <a:schemeClr val="accent1"/>
+          </a:lnRef>
+          <a:fillRef idx="0">
+            <a:schemeClr val="accent1"/>
+          </a:fillRef>
+          <a:effectRef idx="1">
+            <a:schemeClr val="accent1"/>
+          </a:effectRef>
+          <a:fontRef idx="minor">
+            <a:schemeClr val="tx1"/>
+          </a:fontRef>
+        </p:style>
+      </p:cxnSp>
+      <p:cxnSp>
+        <p:nvCxnSpPr>
+          <p:cNvPr id="49" name="Connettore 2 48">
+            <a:extLst>
+              <a:ext uri="{FF2B5EF4-FFF2-40B4-BE49-F238E27FC236}">
+                <a16:creationId xmlns:a16="http://schemas.microsoft.com/office/drawing/2014/main" id="{91745824-5C76-1005-A483-397C05BF49F8}"/>
+              </a:ext>
+            </a:extLst>
+          </p:cNvPr>
+          <p:cNvCxnSpPr>
+            <a:cxnSpLocks/>
+            <a:stCxn id="10" idx="4"/>
+            <a:endCxn id="24" idx="7"/>
+          </p:cNvCxnSpPr>
+          <p:nvPr/>
+        </p:nvCxnSpPr>
+        <p:spPr>
+          <a:xfrm flipH="1">
+            <a:off x="8427888" y="1510556"/>
+            <a:ext cx="1255984" cy="693914"/>
+          </a:xfrm>
+          <a:prstGeom prst="straightConnector1">
+            <a:avLst/>
+          </a:prstGeom>
+          <a:ln>
+            <a:tailEnd type="triangle"/>
+          </a:ln>
+        </p:spPr>
+        <p:style>
+          <a:lnRef idx="2">
+            <a:schemeClr val="accent1"/>
+          </a:lnRef>
+          <a:fillRef idx="0">
+            <a:schemeClr val="accent1"/>
+          </a:fillRef>
+          <a:effectRef idx="1">
+            <a:schemeClr val="accent1"/>
+          </a:effectRef>
+          <a:fontRef idx="minor">
+            <a:schemeClr val="tx1"/>
+          </a:fontRef>
+        </p:style>
+      </p:cxnSp>
+      <p:cxnSp>
+        <p:nvCxnSpPr>
+          <p:cNvPr id="52" name="Connettore 2 51">
+            <a:extLst>
+              <a:ext uri="{FF2B5EF4-FFF2-40B4-BE49-F238E27FC236}">
+                <a16:creationId xmlns:a16="http://schemas.microsoft.com/office/drawing/2014/main" id="{C3A16784-82A4-61B6-9CBA-E38F5C568977}"/>
+              </a:ext>
+            </a:extLst>
+          </p:cNvPr>
+          <p:cNvCxnSpPr>
+            <a:cxnSpLocks/>
+            <a:stCxn id="10" idx="4"/>
+            <a:endCxn id="60" idx="1"/>
+          </p:cNvCxnSpPr>
+          <p:nvPr/>
+        </p:nvCxnSpPr>
+        <p:spPr>
+          <a:xfrm>
+            <a:off x="9683872" y="1510556"/>
+            <a:ext cx="268638" cy="693913"/>
+          </a:xfrm>
+          <a:prstGeom prst="straightConnector1">
+            <a:avLst/>
+          </a:prstGeom>
+          <a:ln>
+            <a:tailEnd type="triangle"/>
+          </a:ln>
+        </p:spPr>
+        <p:style>
+          <a:lnRef idx="2">
+            <a:schemeClr val="accent1"/>
+          </a:lnRef>
+          <a:fillRef idx="0">
+            <a:schemeClr val="accent1"/>
+          </a:fillRef>
+          <a:effectRef idx="1">
+            <a:schemeClr val="accent1"/>
+          </a:effectRef>
+          <a:fontRef idx="minor">
+            <a:schemeClr val="tx1"/>
+          </a:fontRef>
+        </p:style>
+      </p:cxnSp>
+      <p:cxnSp>
+        <p:nvCxnSpPr>
+          <p:cNvPr id="55" name="Connettore 2 54">
+            <a:extLst>
+              <a:ext uri="{FF2B5EF4-FFF2-40B4-BE49-F238E27FC236}">
+                <a16:creationId xmlns:a16="http://schemas.microsoft.com/office/drawing/2014/main" id="{1B63E68A-13E0-0F1F-C347-A9C31FB5E276}"/>
+              </a:ext>
+            </a:extLst>
+          </p:cNvPr>
+          <p:cNvCxnSpPr>
+            <a:cxnSpLocks/>
+            <a:stCxn id="9" idx="4"/>
+            <a:endCxn id="2" idx="0"/>
+          </p:cNvCxnSpPr>
+          <p:nvPr/>
+        </p:nvCxnSpPr>
+        <p:spPr>
+          <a:xfrm>
+            <a:off x="2552825" y="1503843"/>
+            <a:ext cx="398410" cy="2308487"/>
+          </a:xfrm>
+          <a:prstGeom prst="straightConnector1">
+            <a:avLst/>
+          </a:prstGeom>
+          <a:ln>
+            <a:tailEnd type="triangle"/>
+          </a:ln>
+        </p:spPr>
+        <p:style>
+          <a:lnRef idx="2">
+            <a:schemeClr val="accent1"/>
+          </a:lnRef>
+          <a:fillRef idx="0">
+            <a:schemeClr val="accent1"/>
+          </a:fillRef>
+          <a:effectRef idx="1">
+            <a:schemeClr val="accent1"/>
+          </a:effectRef>
+          <a:fontRef idx="minor">
+            <a:schemeClr val="tx1"/>
+          </a:fontRef>
+        </p:style>
+      </p:cxnSp>
+      <p:cxnSp>
+        <p:nvCxnSpPr>
+          <p:cNvPr id="58" name="Connettore 2 57">
+            <a:extLst>
+              <a:ext uri="{FF2B5EF4-FFF2-40B4-BE49-F238E27FC236}">
+                <a16:creationId xmlns:a16="http://schemas.microsoft.com/office/drawing/2014/main" id="{ACB19938-6B9D-6CC3-AD1D-F08E286CF301}"/>
+              </a:ext>
+            </a:extLst>
+          </p:cNvPr>
+          <p:cNvCxnSpPr>
+            <a:cxnSpLocks/>
+            <a:stCxn id="10" idx="4"/>
+            <a:endCxn id="25" idx="0"/>
+          </p:cNvCxnSpPr>
+          <p:nvPr/>
+        </p:nvCxnSpPr>
+        <p:spPr>
+          <a:xfrm flipH="1">
+            <a:off x="9205225" y="1510556"/>
+            <a:ext cx="478647" cy="2382654"/>
+          </a:xfrm>
+          <a:prstGeom prst="straightConnector1">
+            <a:avLst/>
+          </a:prstGeom>
+          <a:ln>
+            <a:tailEnd type="triangle"/>
+          </a:ln>
+        </p:spPr>
+        <p:style>
+          <a:lnRef idx="2">
+            <a:schemeClr val="accent1"/>
+          </a:lnRef>
+          <a:fillRef idx="0">
+            <a:schemeClr val="accent1"/>
+          </a:fillRef>
+          <a:effectRef idx="1">
+            <a:schemeClr val="accent1"/>
+          </a:effectRef>
+          <a:fontRef idx="minor">
+            <a:schemeClr val="tx1"/>
+          </a:fontRef>
+        </p:style>
+      </p:cxnSp>
+      <p:cxnSp>
+        <p:nvCxnSpPr>
+          <p:cNvPr id="64" name="Connettore 2 63">
+            <a:extLst>
+              <a:ext uri="{FF2B5EF4-FFF2-40B4-BE49-F238E27FC236}">
+                <a16:creationId xmlns:a16="http://schemas.microsoft.com/office/drawing/2014/main" id="{FEC56FE4-E1CF-EF27-8DF6-FD32216D4821}"/>
+              </a:ext>
+            </a:extLst>
+          </p:cNvPr>
+          <p:cNvCxnSpPr>
+            <a:cxnSpLocks/>
+            <a:stCxn id="24" idx="4"/>
+            <a:endCxn id="71" idx="7"/>
+          </p:cNvCxnSpPr>
+          <p:nvPr/>
+        </p:nvCxnSpPr>
+        <p:spPr>
+          <a:xfrm flipH="1">
+            <a:off x="6967333" y="3120697"/>
+            <a:ext cx="611570" cy="1811588"/>
+          </a:xfrm>
+          <a:prstGeom prst="straightConnector1">
+            <a:avLst/>
+          </a:prstGeom>
+          <a:ln>
             <a:solidFill>
               <a:schemeClr val="accent2"/>
             </a:solidFill>
-            <a:prstDash val="dash"/>
-            <a:round/>
-            <a:headEnd type="none" w="med" len="med"/>
-            <a:tailEnd type="none" w="med" len="med"/>
+            <a:tailEnd type="triangle"/>
           </a:ln>
         </p:spPr>
         <p:style>
-          <a:lnRef idx="0">
-            <a:scrgbClr r="0" g="0" b="0"/>
+          <a:lnRef idx="2">
+            <a:schemeClr val="accent1"/>
           </a:lnRef>
           <a:fillRef idx="0">
-            <a:scrgbClr r="0" g="0" b="0"/>
+            <a:schemeClr val="accent1"/>
           </a:fillRef>
-          <a:effectRef idx="0">
-            <a:scrgbClr r="0" g="0" b="0"/>
+          <a:effectRef idx="1">
+            <a:schemeClr val="accent1"/>
           </a:effectRef>
           <a:fontRef idx="minor">
             <a:schemeClr val="tx1"/>
